--- a/2026/1012-TF-IDF/RAG_檢索工具與TFIDF實作_Meeting.pptx
+++ b/2026/1012-TF-IDF/RAG_檢索工具與TFIDF實作_Meeting.pptx
@@ -37,11 +37,11 @@
     <p:sldId id="299" r:id="rId28"/>
     <p:sldId id="262" r:id="rId29"/>
     <p:sldId id="271" r:id="rId30"/>
-    <p:sldId id="261" r:id="rId31"/>
-    <p:sldId id="300" r:id="rId32"/>
-    <p:sldId id="269" r:id="rId33"/>
-    <p:sldId id="277" r:id="rId34"/>
-    <p:sldId id="279" r:id="rId35"/>
+    <p:sldId id="301" r:id="rId31"/>
+    <p:sldId id="261" r:id="rId32"/>
+    <p:sldId id="300" r:id="rId33"/>
+    <p:sldId id="269" r:id="rId34"/>
+    <p:sldId id="277" r:id="rId35"/>
   </p:sldIdLst>
   <p:sldSz cx="12192000" cy="6858000"/>
   <p:notesSz cx="6858000" cy="9144000"/>
@@ -146,7 +146,7 @@
 <file path=ppt/revisionInfo.xml><?xml version="1.0" encoding="utf-8"?>
 <p1510:revInfo xmlns:a="http://schemas.openxmlformats.org/drawingml/2006/main" xmlns:r="http://schemas.openxmlformats.org/officeDocument/2006/relationships" xmlns:p1510="http://schemas.microsoft.com/office/powerpoint/2015/10/main">
   <p1510:revLst>
-    <p1510:client id="{480854D9-3717-6565-E99C-DE55DE2C6577}" v="381" dt="2026-10-12T04:56:22.567"/>
+    <p1510:client id="{480854D9-3717-6565-E99C-DE55DE2C6577}" v="411" dt="2026-10-12T05:05:00.659"/>
   </p1510:revLst>
 </p1510:revInfo>
 </file>
@@ -2590,6 +2590,117 @@
   <p:cSld>
     <p:spTree>
       <p:nvGrpSpPr>
+        <p:cNvPr id="1" name="">
+          <a:extLst>
+            <a:ext uri="{FF2B5EF4-FFF2-40B4-BE49-F238E27FC236}">
+              <a16:creationId xmlns:a16="http://schemas.microsoft.com/office/drawing/2014/main" id="{C8E5637C-7FD1-F29D-E02E-FD4D3E38E779}"/>
+            </a:ext>
+          </a:extLst>
+        </p:cNvPr>
+        <p:cNvGrpSpPr/>
+        <p:nvPr/>
+      </p:nvGrpSpPr>
+      <p:grpSpPr>
+        <a:xfrm>
+          <a:off x="0" y="0"/>
+          <a:ext cx="0" cy="0"/>
+          <a:chOff x="0" y="0"/>
+          <a:chExt cx="0" cy="0"/>
+        </a:xfrm>
+      </p:grpSpPr>
+      <p:sp>
+        <p:nvSpPr>
+          <p:cNvPr id="2" name="Slide Image Placeholder 1">
+            <a:extLst>
+              <a:ext uri="{FF2B5EF4-FFF2-40B4-BE49-F238E27FC236}">
+                <a16:creationId xmlns:a16="http://schemas.microsoft.com/office/drawing/2014/main" id="{37396993-93DF-508B-47E2-B6DAD369F4DA}"/>
+              </a:ext>
+            </a:extLst>
+          </p:cNvPr>
+          <p:cNvSpPr>
+            <a:spLocks noGrp="1" noRot="1" noChangeAspect="1"/>
+          </p:cNvSpPr>
+          <p:nvPr>
+            <p:ph type="sldImg"/>
+          </p:nvPr>
+        </p:nvSpPr>
+        <p:spPr/>
+      </p:sp>
+      <p:sp>
+        <p:nvSpPr>
+          <p:cNvPr id="3" name="Notes Placeholder 2">
+            <a:extLst>
+              <a:ext uri="{FF2B5EF4-FFF2-40B4-BE49-F238E27FC236}">
+                <a16:creationId xmlns:a16="http://schemas.microsoft.com/office/drawing/2014/main" id="{63B77108-7862-4871-EA99-E2655E1305F4}"/>
+              </a:ext>
+            </a:extLst>
+          </p:cNvPr>
+          <p:cNvSpPr>
+            <a:spLocks noGrp="1"/>
+          </p:cNvSpPr>
+          <p:nvPr>
+            <p:ph type="body" idx="1"/>
+          </p:nvPr>
+        </p:nvSpPr>
+        <p:spPr/>
+        <p:txBody>
+          <a:bodyPr/>
+          <a:lstStyle/>
+          <a:p>
+            <a:r>
+              <a:t>來源 https://www.elastic.co/docs/reference/elasticsearch/index-settings/similarity ; https://scikit-learn.org/stable/modules/generated/sklearn.feature_extraction.text.TfidfTransformer.html</a:t>
+            </a:r>
+          </a:p>
+          <a:p>
+            <a:r>
+              <a:t>內容依據：使用者貼上的 README、司法系統 core.py / live_search.py、檢索與IDEAL核心展示.ipynb。</a:t>
+            </a:r>
+          </a:p>
+        </p:txBody>
+      </p:sp>
+      <p:sp>
+        <p:nvSpPr>
+          <p:cNvPr id="4" name="Slide Number Placeholder 3">
+            <a:extLst>
+              <a:ext uri="{FF2B5EF4-FFF2-40B4-BE49-F238E27FC236}">
+                <a16:creationId xmlns:a16="http://schemas.microsoft.com/office/drawing/2014/main" id="{3C8D61AE-1436-E1AA-ED7A-2B4FDFB827C8}"/>
+              </a:ext>
+            </a:extLst>
+          </p:cNvPr>
+          <p:cNvSpPr>
+            <a:spLocks noGrp="1"/>
+          </p:cNvSpPr>
+          <p:nvPr>
+            <p:ph type="sldNum" idx="5"/>
+          </p:nvPr>
+        </p:nvSpPr>
+        <p:spPr/>
+        <p:txBody>
+          <a:bodyPr/>
+          <a:lstStyle/>
+          <a:p>
+            <a:endParaRPr/>
+          </a:p>
+        </p:txBody>
+      </p:sp>
+    </p:spTree>
+    <p:extLst>
+      <p:ext uri="{BB962C8B-B14F-4D97-AF65-F5344CB8AC3E}">
+        <p14:creationId xmlns:p14="http://schemas.microsoft.com/office/powerpoint/2010/main" val="1165639157"/>
+      </p:ext>
+    </p:extLst>
+  </p:cSld>
+  <p:clrMapOvr>
+    <a:masterClrMapping/>
+  </p:clrMapOvr>
+</p:notes>
+</file>
+
+<file path=ppt/notesSlides/notesSlide31.xml><?xml version="1.0" encoding="utf-8"?>
+<p:notes xmlns:a="http://schemas.openxmlformats.org/drawingml/2006/main" xmlns:r="http://schemas.openxmlformats.org/officeDocument/2006/relationships" xmlns:p="http://schemas.openxmlformats.org/presentationml/2006/main">
+  <p:cSld>
+    <p:spTree>
+      <p:nvGrpSpPr>
         <p:cNvPr id="1" name=""/>
         <p:cNvGrpSpPr/>
         <p:nvPr/>
@@ -2667,7 +2778,7 @@
 </p:notes>
 </file>
 
-<file path=ppt/notesSlides/notesSlide31.xml><?xml version="1.0" encoding="utf-8"?>
+<file path=ppt/notesSlides/notesSlide32.xml><?xml version="1.0" encoding="utf-8"?>
 <p:notes xmlns:a="http://schemas.openxmlformats.org/drawingml/2006/main" xmlns:r="http://schemas.openxmlformats.org/officeDocument/2006/relationships" xmlns:p="http://schemas.openxmlformats.org/presentationml/2006/main">
   <p:cSld>
     <p:spTree>
@@ -2771,88 +2882,6 @@
         <p14:creationId xmlns:p14="http://schemas.microsoft.com/office/powerpoint/2010/main" val="2019154942"/>
       </p:ext>
     </p:extLst>
-  </p:cSld>
-  <p:clrMapOvr>
-    <a:masterClrMapping/>
-  </p:clrMapOvr>
-</p:notes>
-</file>
-
-<file path=ppt/notesSlides/notesSlide32.xml><?xml version="1.0" encoding="utf-8"?>
-<p:notes xmlns:a="http://schemas.openxmlformats.org/drawingml/2006/main" xmlns:r="http://schemas.openxmlformats.org/officeDocument/2006/relationships" xmlns:p="http://schemas.openxmlformats.org/presentationml/2006/main">
-  <p:cSld>
-    <p:spTree>
-      <p:nvGrpSpPr>
-        <p:cNvPr id="1" name=""/>
-        <p:cNvGrpSpPr/>
-        <p:nvPr/>
-      </p:nvGrpSpPr>
-      <p:grpSpPr>
-        <a:xfrm>
-          <a:off x="0" y="0"/>
-          <a:ext cx="0" cy="0"/>
-          <a:chOff x="0" y="0"/>
-          <a:chExt cx="0" cy="0"/>
-        </a:xfrm>
-      </p:grpSpPr>
-      <p:sp>
-        <p:nvSpPr>
-          <p:cNvPr id="2" name="Slide Image Placeholder 1"/>
-          <p:cNvSpPr>
-            <a:spLocks noGrp="1" noRot="1" noChangeAspect="1"/>
-          </p:cNvSpPr>
-          <p:nvPr>
-            <p:ph type="sldImg"/>
-          </p:nvPr>
-        </p:nvSpPr>
-        <p:spPr/>
-      </p:sp>
-      <p:sp>
-        <p:nvSpPr>
-          <p:cNvPr id="3" name="Notes Placeholder 2"/>
-          <p:cNvSpPr>
-            <a:spLocks noGrp="1"/>
-          </p:cNvSpPr>
-          <p:nvPr>
-            <p:ph type="body" idx="1"/>
-          </p:nvPr>
-        </p:nvSpPr>
-        <p:spPr/>
-        <p:txBody>
-          <a:bodyPr/>
-          <a:lstStyle/>
-          <a:p>
-            <a:r>
-              <a:t>數字核對已執行 Notebook。此案例沒有套司法系統規則加分；用未四捨五入權重計算。</a:t>
-            </a:r>
-          </a:p>
-          <a:p>
-            <a:r>
-              <a:t>內容依據：使用者貼上的 README、司法系統 core.py / live_search.py、檢索與IDEAL核心展示.ipynb。</a:t>
-            </a:r>
-          </a:p>
-        </p:txBody>
-      </p:sp>
-      <p:sp>
-        <p:nvSpPr>
-          <p:cNvPr id="4" name="Slide Number Placeholder 3"/>
-          <p:cNvSpPr>
-            <a:spLocks noGrp="1"/>
-          </p:cNvSpPr>
-          <p:nvPr>
-            <p:ph type="sldNum" idx="5"/>
-          </p:nvPr>
-        </p:nvSpPr>
-        <p:spPr/>
-        <p:txBody>
-          <a:bodyPr/>
-          <a:lstStyle/>
-          <a:p>
-            <a:endParaRPr/>
-          </a:p>
-        </p:txBody>
-      </p:sp>
-    </p:spTree>
   </p:cSld>
   <p:clrMapOvr>
     <a:masterClrMapping/>
@@ -2905,7 +2934,7 @@
           <a:lstStyle/>
           <a:p>
             <a:r>
-              <a:t>來源IDEAL-RAG原文Table4.1，§4.1.1另稱hybrid組合，與表格呈現不完全一致；未確認融合權重/索引後端。這是實驗配置，不是IDEAL必需採特定retriever。</a:t>
+              <a:t>數字核對已執行 Notebook。此案例沒有套司法系統規則加分；用未四捨五入權重計算。</a:t>
             </a:r>
           </a:p>
           <a:p>
@@ -2987,7 +3016,7 @@
           <a:lstStyle/>
           <a:p>
             <a:r>
-              <a:t>本次回答embedding位置以及程式資料流，不新增實驗優越性結論。可跳轉檢索與IDEAL核心展示.ipynb做live demo。</a:t>
+              <a:t>來源IDEAL-RAG原文Table4.1，§4.1.1另稱hybrid組合，與表格呈現不完全一致；未確認融合權重/索引後端。這是實驗配置，不是IDEAL必需採特定retriever。</a:t>
             </a:r>
           </a:p>
           <a:p>
@@ -15541,74 +15570,6 @@
           </a:graphicData>
         </a:graphic>
       </p:graphicFrame>
-      <p:sp>
-        <p:nvSpPr>
-          <p:cNvPr id="5" name="矩形 4">
-            <a:extLst>
-              <a:ext uri="{FF2B5EF4-FFF2-40B4-BE49-F238E27FC236}">
-                <a16:creationId xmlns:a16="http://schemas.microsoft.com/office/drawing/2014/main" id="{19BAEFB1-575E-4F47-96CE-8C51B73E00AC}"/>
-              </a:ext>
-            </a:extLst>
-          </p:cNvPr>
-          <p:cNvSpPr>
-            <a:spLocks noGrp="1"/>
-          </p:cNvSpPr>
-          <p:nvPr/>
-        </p:nvSpPr>
-        <p:spPr>
-          <a:xfrm>
-            <a:off x="590550" y="6057900"/>
-            <a:ext cx="10763250" cy="342900"/>
-          </a:xfrm>
-          <a:prstGeom prst="rect">
-            <a:avLst/>
-          </a:prstGeom>
-          <a:noFill/>
-          <a:ln w="0">
-            <a:noFill/>
-          </a:ln>
-        </p:spPr>
-        <p:txBody>
-          <a:bodyPr lIns="0" tIns="0" rIns="0" bIns="0">
-            <a:noAutofit/>
-          </a:bodyPr>
-          <a:lstStyle>
-            <a:defPPr>
-              <a:defRPr sz="1500" b="0">
-                <a:solidFill>
-                  <a:srgbClr val="5F717B"/>
-                </a:solidFill>
-                <a:latin typeface="Microsoft JhengHei"/>
-                <a:ea typeface="Microsoft JhengHei"/>
-                <a:cs typeface="Microsoft JhengHei"/>
-              </a:defRPr>
-            </a:defPPr>
-          </a:lstStyle>
-          <a:p>
-            <a:pPr>
-              <a:defRPr sz="1500" b="0">
-                <a:solidFill>
-                  <a:srgbClr val="5F717B"/>
-                </a:solidFill>
-                <a:latin typeface="Microsoft JhengHei"/>
-                <a:ea typeface="Microsoft JhengHei"/>
-                <a:cs typeface="Microsoft JhengHei"/>
-              </a:defRPr>
-            </a:pPr>
-            <a:r>
-              <a:rPr sz="1500" b="0">
-                <a:solidFill>
-                  <a:srgbClr val="5F717B"/>
-                </a:solidFill>
-                <a:latin typeface="Microsoft JhengHei"/>
-                <a:ea typeface="Microsoft JhengHei"/>
-                <a:cs typeface="Microsoft JhengHei"/>
-              </a:rPr>
-              <a:t>兩者通常依字面特徵匹配；方法較早提出不代表一定不適用。</a:t>
-            </a:r>
-          </a:p>
-        </p:txBody>
-      </p:sp>
     </p:spTree>
     <p:extLst>
       <p:ext uri="{BB962C8B-B14F-4D97-AF65-F5344CB8AC3E}">
@@ -16234,7 +16195,7 @@
           </a:ln>
         </p:spPr>
         <p:txBody>
-          <a:bodyPr lIns="0" tIns="0" rIns="0" bIns="0">
+          <a:bodyPr lIns="0" tIns="0" rIns="0" bIns="0" anchor="t">
             <a:noAutofit/>
           </a:bodyPr>
           <a:lstStyle>
@@ -16271,6 +16232,25 @@
               </a:rPr>
               <a:t>TF-IDF＋cosine／BM25</a:t>
             </a:r>
+            <a:r>
+              <a:rPr lang="en-US">
+                <a:solidFill>
+                  <a:srgbClr val="00858A"/>
+                </a:solidFill>
+                <a:latin typeface="Microsoft JhengHei"/>
+                <a:ea typeface="Microsoft JhengHei"/>
+                <a:cs typeface="Microsoft JhengHei"/>
+              </a:rPr>
+              <a:t>/</a:t>
+            </a:r>
+            <a:endParaRPr sz="1800" b="0">
+              <a:solidFill>
+                <a:srgbClr val="00858A"/>
+              </a:solidFill>
+              <a:latin typeface="Microsoft JhengHei"/>
+              <a:ea typeface="Microsoft JhengHei"/>
+              <a:cs typeface="Microsoft JhengHei"/>
+            </a:endParaRPr>
           </a:p>
           <a:p>
             <a:pPr>
@@ -16284,7 +16264,7 @@
               </a:defRPr>
             </a:pPr>
             <a:r>
-              <a:rPr sz="1800" b="0">
+              <a:rPr sz="1800" b="0" dirty="0" err="1">
                 <a:solidFill>
                   <a:srgbClr val="00858A"/>
                 </a:solidFill>
@@ -16414,6 +16394,148 @@
     </p:bg>
     <p:spTree>
       <p:nvGrpSpPr>
+        <p:cNvPr id="1" name="">
+          <a:extLst>
+            <a:ext uri="{FF2B5EF4-FFF2-40B4-BE49-F238E27FC236}">
+              <a16:creationId xmlns:a16="http://schemas.microsoft.com/office/drawing/2014/main" id="{2DC6444B-34C8-0A9C-070D-71A994E5663A}"/>
+            </a:ext>
+          </a:extLst>
+        </p:cNvPr>
+        <p:cNvGrpSpPr/>
+        <p:nvPr/>
+      </p:nvGrpSpPr>
+      <p:grpSpPr>
+        <a:xfrm>
+          <a:off x="0" y="0"/>
+          <a:ext cx="0" cy="0"/>
+          <a:chOff x="0" y="0"/>
+          <a:chExt cx="0" cy="0"/>
+        </a:xfrm>
+      </p:grpSpPr>
+      <p:sp>
+        <p:nvSpPr>
+          <p:cNvPr id="3" name="矩形 2">
+            <a:extLst>
+              <a:ext uri="{FF2B5EF4-FFF2-40B4-BE49-F238E27FC236}">
+                <a16:creationId xmlns:a16="http://schemas.microsoft.com/office/drawing/2014/main" id="{CFB9218C-9E54-1340-C786-C0A0C1F5202C}"/>
+              </a:ext>
+            </a:extLst>
+          </p:cNvPr>
+          <p:cNvSpPr>
+            <a:spLocks noGrp="1"/>
+          </p:cNvSpPr>
+          <p:nvPr/>
+        </p:nvSpPr>
+        <p:spPr>
+          <a:xfrm>
+            <a:off x="11239500" y="6457950"/>
+            <a:ext cx="523875" cy="266700"/>
+          </a:xfrm>
+          <a:prstGeom prst="rect">
+            <a:avLst/>
+          </a:prstGeom>
+          <a:noFill/>
+          <a:ln w="0">
+            <a:noFill/>
+          </a:ln>
+        </p:spPr>
+        <p:txBody>
+          <a:bodyPr lIns="0" tIns="0" rIns="0" bIns="0">
+            <a:noAutofit/>
+          </a:bodyPr>
+          <a:lstStyle>
+            <a:defPPr>
+              <a:defRPr sz="1200" b="0">
+                <a:solidFill>
+                  <a:srgbClr val="5F717B"/>
+                </a:solidFill>
+                <a:latin typeface="Microsoft JhengHei"/>
+                <a:ea typeface="Microsoft JhengHei"/>
+                <a:cs typeface="Microsoft JhengHei"/>
+              </a:defRPr>
+            </a:defPPr>
+          </a:lstStyle>
+          <a:p>
+            <a:pPr>
+              <a:defRPr sz="1200" b="0">
+                <a:solidFill>
+                  <a:srgbClr val="5F717B"/>
+                </a:solidFill>
+                <a:latin typeface="Microsoft JhengHei"/>
+                <a:ea typeface="Microsoft JhengHei"/>
+                <a:cs typeface="Microsoft JhengHei"/>
+              </a:defRPr>
+            </a:pPr>
+            <a:r>
+              <a:rPr sz="1200" b="0">
+                <a:solidFill>
+                  <a:srgbClr val="5F717B"/>
+                </a:solidFill>
+                <a:latin typeface="Microsoft JhengHei"/>
+                <a:ea typeface="Microsoft JhengHei"/>
+                <a:cs typeface="Microsoft JhengHei"/>
+              </a:rPr>
+              <a:t>16</a:t>
+            </a:r>
+          </a:p>
+        </p:txBody>
+      </p:sp>
+      <p:pic>
+        <p:nvPicPr>
+          <p:cNvPr id="9" name="圖片 8" descr="一張含有 文字, 螢幕擷取畫面, 字型, 數字 的圖片&#10;&#10;AI 產生的內容可能不正確。">
+            <a:extLst>
+              <a:ext uri="{FF2B5EF4-FFF2-40B4-BE49-F238E27FC236}">
+                <a16:creationId xmlns:a16="http://schemas.microsoft.com/office/drawing/2014/main" id="{E2742C23-E9AE-78AD-658C-085913E6E5EC}"/>
+              </a:ext>
+            </a:extLst>
+          </p:cNvPr>
+          <p:cNvPicPr>
+            <a:picLocks noChangeAspect="1"/>
+          </p:cNvPicPr>
+          <p:nvPr/>
+        </p:nvPicPr>
+        <p:blipFill>
+          <a:blip r:embed="rId3"/>
+          <a:stretch>
+            <a:fillRect/>
+          </a:stretch>
+        </p:blipFill>
+        <p:spPr>
+          <a:xfrm>
+            <a:off x="2770379" y="0"/>
+            <a:ext cx="6839133" cy="6858000"/>
+          </a:xfrm>
+          <a:prstGeom prst="rect">
+            <a:avLst/>
+          </a:prstGeom>
+        </p:spPr>
+      </p:pic>
+    </p:spTree>
+    <p:extLst>
+      <p:ext uri="{BB962C8B-B14F-4D97-AF65-F5344CB8AC3E}">
+        <p14:creationId xmlns:p14="http://schemas.microsoft.com/office/powerpoint/2010/main" val="2236461622"/>
+      </p:ext>
+    </p:extLst>
+  </p:cSld>
+  <p:clrMapOvr>
+    <a:masterClrMapping/>
+  </p:clrMapOvr>
+</p:sld>
+</file>
+
+<file path=ppt/slides/slide31.xml><?xml version="1.0" encoding="utf-8"?>
+<p:sld xmlns:a="http://schemas.openxmlformats.org/drawingml/2006/main" xmlns:r="http://schemas.openxmlformats.org/officeDocument/2006/relationships" xmlns:p="http://schemas.openxmlformats.org/presentationml/2006/main">
+  <p:cSld>
+    <p:bg>
+      <p:bgPr>
+        <a:solidFill>
+          <a:srgbClr val="FFFFFF"/>
+        </a:solidFill>
+        <a:effectLst/>
+      </p:bgPr>
+    </p:bg>
+    <p:spTree>
+      <p:nvGrpSpPr>
         <p:cNvPr id="1" name=""/>
         <p:cNvGrpSpPr/>
         <p:nvPr/>
@@ -17074,7 +17196,7 @@
 </p:sld>
 </file>
 
-<file path=ppt/slides/slide31.xml><?xml version="1.0" encoding="utf-8"?>
+<file path=ppt/slides/slide32.xml><?xml version="1.0" encoding="utf-8"?>
 <p:sld xmlns:a="http://schemas.openxmlformats.org/drawingml/2006/main" xmlns:r="http://schemas.openxmlformats.org/officeDocument/2006/relationships" xmlns:p="http://schemas.openxmlformats.org/presentationml/2006/main">
   <p:cSld>
     <p:bg>
@@ -17488,7 +17610,7 @@
 </p:sld>
 </file>
 
-<file path=ppt/slides/slide32.xml><?xml version="1.0" encoding="utf-8"?>
+<file path=ppt/slides/slide33.xml><?xml version="1.0" encoding="utf-8"?>
 <p:sld xmlns:a="http://schemas.openxmlformats.org/drawingml/2006/main" xmlns:r="http://schemas.openxmlformats.org/officeDocument/2006/relationships" xmlns:p="http://schemas.openxmlformats.org/presentationml/2006/main">
   <p:cSld>
     <p:bg>
@@ -18025,7 +18147,7 @@
 </p:sld>
 </file>
 
-<file path=ppt/slides/slide33.xml><?xml version="1.0" encoding="utf-8"?>
+<file path=ppt/slides/slide34.xml><?xml version="1.0" encoding="utf-8"?>
 <p:sld xmlns:a="http://schemas.openxmlformats.org/drawingml/2006/main" xmlns:r="http://schemas.openxmlformats.org/officeDocument/2006/relationships" xmlns:p="http://schemas.openxmlformats.org/presentationml/2006/main">
   <p:cSld>
     <p:bg>
@@ -18836,727 +18958,6 @@
     <p:extLst>
       <p:ext uri="{BB962C8B-B14F-4D97-AF65-F5344CB8AC3E}">
         <p14:creationId xmlns:p14="http://schemas.microsoft.com/office/powerpoint/2010/main" val="283938115"/>
-      </p:ext>
-    </p:extLst>
-  </p:cSld>
-  <p:clrMapOvr>
-    <a:masterClrMapping/>
-  </p:clrMapOvr>
-</p:sld>
-</file>
-
-<file path=ppt/slides/slide34.xml><?xml version="1.0" encoding="utf-8"?>
-<p:sld xmlns:a="http://schemas.openxmlformats.org/drawingml/2006/main" xmlns:r="http://schemas.openxmlformats.org/officeDocument/2006/relationships" xmlns:p="http://schemas.openxmlformats.org/presentationml/2006/main">
-  <p:cSld>
-    <p:bg>
-      <p:bgPr>
-        <a:solidFill>
-          <a:srgbClr val="FFFFFF"/>
-        </a:solidFill>
-        <a:effectLst/>
-      </p:bgPr>
-    </p:bg>
-    <p:spTree>
-      <p:nvGrpSpPr>
-        <p:cNvPr id="1" name=""/>
-        <p:cNvGrpSpPr/>
-        <p:nvPr/>
-      </p:nvGrpSpPr>
-      <p:grpSpPr>
-        <a:xfrm>
-          <a:off x="0" y="0"/>
-          <a:ext cx="0" cy="0"/>
-          <a:chOff x="0" y="0"/>
-          <a:chExt cx="0" cy="0"/>
-        </a:xfrm>
-      </p:grpSpPr>
-      <p:sp>
-        <p:nvSpPr>
-          <p:cNvPr id="10" name="矩形 9">
-            <a:extLst>
-              <a:ext uri="{FF2B5EF4-FFF2-40B4-BE49-F238E27FC236}">
-                <a16:creationId xmlns:a16="http://schemas.microsoft.com/office/drawing/2014/main" id="{902750B4-9619-4A13-A84B-F17FCDA10C9A}"/>
-              </a:ext>
-            </a:extLst>
-          </p:cNvPr>
-          <p:cNvSpPr>
-            <a:spLocks noGrp="1"/>
-          </p:cNvSpPr>
-          <p:nvPr/>
-        </p:nvSpPr>
-        <p:spPr>
-          <a:xfrm>
-            <a:off x="571500" y="361950"/>
-            <a:ext cx="11049000" cy="619125"/>
-          </a:xfrm>
-          <a:prstGeom prst="rect">
-            <a:avLst/>
-          </a:prstGeom>
-          <a:noFill/>
-          <a:ln w="0">
-            <a:noFill/>
-          </a:ln>
-        </p:spPr>
-        <p:txBody>
-          <a:bodyPr lIns="0" tIns="0" rIns="0" bIns="0" anchor="t">
-            <a:noAutofit/>
-          </a:bodyPr>
-          <a:lstStyle>
-            <a:defPPr>
-              <a:defRPr sz="3150" b="1">
-                <a:solidFill>
-                  <a:srgbClr val="173340"/>
-                </a:solidFill>
-                <a:latin typeface="Microsoft JhengHei"/>
-                <a:ea typeface="Microsoft JhengHei"/>
-                <a:cs typeface="Microsoft JhengHei"/>
-              </a:defRPr>
-            </a:defPPr>
-          </a:lstStyle>
-          <a:p>
-            <a:pPr>
-              <a:defRPr sz="3150" b="1">
-                <a:solidFill>
-                  <a:srgbClr val="173340"/>
-                </a:solidFill>
-                <a:latin typeface="Microsoft JhengHei"/>
-                <a:ea typeface="Microsoft JhengHei"/>
-                <a:cs typeface="Microsoft JhengHei"/>
-              </a:defRPr>
-            </a:pPr>
-            <a:r>
-              <a:rPr sz="3150" b="1">
-                <a:solidFill>
-                  <a:srgbClr val="173340"/>
-                </a:solidFill>
-                <a:latin typeface="Microsoft JhengHei"/>
-                <a:ea typeface="Microsoft JhengHei"/>
-                <a:cs typeface="Microsoft JhengHei"/>
-              </a:rPr>
-              <a:t>先表示與檢索，再生成</a:t>
-            </a:r>
-            <a:endParaRPr lang="zh-TW" altLang="en-US" sz="3150" b="1">
-              <a:solidFill>
-                <a:srgbClr val="173340"/>
-              </a:solidFill>
-              <a:latin typeface="Microsoft JhengHei"/>
-              <a:ea typeface="Microsoft JhengHei"/>
-              <a:cs typeface="Microsoft JhengHei"/>
-            </a:endParaRPr>
-          </a:p>
-        </p:txBody>
-      </p:sp>
-      <p:sp>
-        <p:nvSpPr>
-          <p:cNvPr id="2" name="矩形 1">
-            <a:extLst>
-              <a:ext uri="{FF2B5EF4-FFF2-40B4-BE49-F238E27FC236}">
-                <a16:creationId xmlns:a16="http://schemas.microsoft.com/office/drawing/2014/main" id="{193D66F2-83DC-4924-A0C9-E861E7527CC4}"/>
-              </a:ext>
-            </a:extLst>
-          </p:cNvPr>
-          <p:cNvSpPr>
-            <a:spLocks noGrp="1"/>
-          </p:cNvSpPr>
-          <p:nvPr/>
-        </p:nvSpPr>
-        <p:spPr>
-          <a:xfrm>
-            <a:off x="11239500" y="6457950"/>
-            <a:ext cx="523875" cy="266700"/>
-          </a:xfrm>
-          <a:prstGeom prst="rect">
-            <a:avLst/>
-          </a:prstGeom>
-          <a:noFill/>
-          <a:ln w="0">
-            <a:noFill/>
-          </a:ln>
-        </p:spPr>
-        <p:txBody>
-          <a:bodyPr lIns="0" tIns="0" rIns="0" bIns="0">
-            <a:noAutofit/>
-          </a:bodyPr>
-          <a:lstStyle>
-            <a:defPPr>
-              <a:defRPr sz="1200" b="0">
-                <a:solidFill>
-                  <a:srgbClr val="5F717B"/>
-                </a:solidFill>
-                <a:latin typeface="Microsoft JhengHei"/>
-                <a:ea typeface="Microsoft JhengHei"/>
-                <a:cs typeface="Microsoft JhengHei"/>
-              </a:defRPr>
-            </a:defPPr>
-          </a:lstStyle>
-          <a:p>
-            <a:pPr>
-              <a:defRPr sz="1200" b="0">
-                <a:solidFill>
-                  <a:srgbClr val="5F717B"/>
-                </a:solidFill>
-                <a:latin typeface="Microsoft JhengHei"/>
-                <a:ea typeface="Microsoft JhengHei"/>
-                <a:cs typeface="Microsoft JhengHei"/>
-              </a:defRPr>
-            </a:pPr>
-            <a:r>
-              <a:rPr sz="1200" b="0">
-                <a:solidFill>
-                  <a:srgbClr val="5F717B"/>
-                </a:solidFill>
-                <a:latin typeface="Microsoft JhengHei"/>
-                <a:ea typeface="Microsoft JhengHei"/>
-                <a:cs typeface="Microsoft JhengHei"/>
-              </a:rPr>
-              <a:t>24</a:t>
-            </a:r>
-          </a:p>
-        </p:txBody>
-      </p:sp>
-      <p:sp>
-        <p:nvSpPr>
-          <p:cNvPr id="3" name="矩形 2">
-            <a:extLst>
-              <a:ext uri="{FF2B5EF4-FFF2-40B4-BE49-F238E27FC236}">
-                <a16:creationId xmlns:a16="http://schemas.microsoft.com/office/drawing/2014/main" id="{F5CEEA0E-2C40-4569-A102-4F0284D6456F}"/>
-              </a:ext>
-            </a:extLst>
-          </p:cNvPr>
-          <p:cNvSpPr>
-            <a:spLocks noGrp="1"/>
-          </p:cNvSpPr>
-          <p:nvPr/>
-        </p:nvSpPr>
-        <p:spPr>
-          <a:xfrm>
-            <a:off x="609600" y="1762125"/>
-            <a:ext cx="2333625" cy="619125"/>
-          </a:xfrm>
-          <a:prstGeom prst="rect">
-            <a:avLst/>
-          </a:prstGeom>
-          <a:noFill/>
-          <a:ln w="0">
-            <a:noFill/>
-          </a:ln>
-        </p:spPr>
-        <p:txBody>
-          <a:bodyPr lIns="0" tIns="0" rIns="0" bIns="0" anchor="t">
-            <a:noAutofit/>
-          </a:bodyPr>
-          <a:lstStyle>
-            <a:defPPr>
-              <a:defRPr sz="2175" b="1">
-                <a:solidFill>
-                  <a:srgbClr val="00858A"/>
-                </a:solidFill>
-                <a:latin typeface="Microsoft JhengHei"/>
-                <a:ea typeface="Microsoft JhengHei"/>
-                <a:cs typeface="Microsoft JhengHei"/>
-              </a:defRPr>
-            </a:defPPr>
-          </a:lstStyle>
-          <a:p>
-            <a:pPr>
-              <a:defRPr sz="2175" b="1">
-                <a:solidFill>
-                  <a:srgbClr val="00858A"/>
-                </a:solidFill>
-                <a:latin typeface="Microsoft JhengHei"/>
-                <a:ea typeface="Microsoft JhengHei"/>
-                <a:cs typeface="Microsoft JhengHei"/>
-              </a:defRPr>
-            </a:pPr>
-            <a:r>
-              <a:rPr lang="zh-TW" sz="2150" b="1" dirty="0" err="1">
-                <a:solidFill>
-                  <a:srgbClr val="00858A"/>
-                </a:solidFill>
-                <a:latin typeface="Microsoft JhengHei"/>
-                <a:ea typeface="Microsoft JhengHei"/>
-              </a:rPr>
-              <a:t>我的司法系統</a:t>
-            </a:r>
-            <a:endParaRPr lang="zh-TW" dirty="0" err="1"/>
-          </a:p>
-        </p:txBody>
-      </p:sp>
-      <p:sp>
-        <p:nvSpPr>
-          <p:cNvPr id="4" name="矩形 3">
-            <a:extLst>
-              <a:ext uri="{FF2B5EF4-FFF2-40B4-BE49-F238E27FC236}">
-                <a16:creationId xmlns:a16="http://schemas.microsoft.com/office/drawing/2014/main" id="{DA59921E-6657-4720-BB6E-66E282B1F1F8}"/>
-              </a:ext>
-            </a:extLst>
-          </p:cNvPr>
-          <p:cNvSpPr>
-            <a:spLocks noGrp="1"/>
-          </p:cNvSpPr>
-          <p:nvPr/>
-        </p:nvSpPr>
-        <p:spPr>
-          <a:xfrm>
-            <a:off x="3048000" y="1762125"/>
-            <a:ext cx="8286750" cy="857250"/>
-          </a:xfrm>
-          <a:prstGeom prst="rect">
-            <a:avLst/>
-          </a:prstGeom>
-          <a:noFill/>
-          <a:ln w="0">
-            <a:noFill/>
-          </a:ln>
-        </p:spPr>
-        <p:txBody>
-          <a:bodyPr lIns="0" tIns="0" rIns="0" bIns="0" anchor="t">
-            <a:noAutofit/>
-          </a:bodyPr>
-          <a:lstStyle>
-            <a:defPPr>
-              <a:defRPr sz="2100" b="0">
-                <a:solidFill>
-                  <a:srgbClr val="173340"/>
-                </a:solidFill>
-                <a:latin typeface="Microsoft JhengHei"/>
-                <a:ea typeface="Microsoft JhengHei"/>
-                <a:cs typeface="Microsoft JhengHei"/>
-              </a:defRPr>
-            </a:defPPr>
-          </a:lstStyle>
-          <a:p>
-            <a:pPr>
-              <a:defRPr sz="2100" b="0">
-                <a:solidFill>
-                  <a:srgbClr val="173340"/>
-                </a:solidFill>
-                <a:latin typeface="Microsoft JhengHei"/>
-                <a:ea typeface="Microsoft JhengHei"/>
-                <a:cs typeface="Microsoft JhengHei"/>
-              </a:defRPr>
-            </a:pPr>
-            <a:r>
-              <a:rPr lang="zh-TW" sz="2100" dirty="0" err="1">
-                <a:solidFill>
-                  <a:srgbClr val="173340"/>
-                </a:solidFill>
-                <a:latin typeface="Microsoft JhengHei"/>
-                <a:ea typeface="Microsoft JhengHei"/>
-                <a:cs typeface="Microsoft JhengHei"/>
-              </a:rPr>
-              <a:t>官網候選</a:t>
-            </a:r>
-            <a:r>
-              <a:rPr lang="zh-TW" sz="2100" dirty="0">
-                <a:solidFill>
-                  <a:srgbClr val="173340"/>
-                </a:solidFill>
-                <a:latin typeface="Microsoft JhengHei"/>
-                <a:ea typeface="Microsoft JhengHei"/>
-                <a:cs typeface="Microsoft JhengHei"/>
-              </a:rPr>
-              <a:t>文件</a:t>
-            </a:r>
-            <a:r>
-              <a:rPr sz="2100" b="0" dirty="0">
-                <a:solidFill>
-                  <a:srgbClr val="173340"/>
-                </a:solidFill>
-                <a:latin typeface="Microsoft JhengHei"/>
-                <a:ea typeface="Microsoft JhengHei"/>
-                <a:cs typeface="Microsoft JhengHei"/>
-              </a:rPr>
-              <a:t> → </a:t>
-            </a:r>
-            <a:r>
-              <a:rPr sz="2100" b="0" dirty="0" err="1">
-                <a:solidFill>
-                  <a:srgbClr val="173340"/>
-                </a:solidFill>
-                <a:latin typeface="Microsoft JhengHei"/>
-                <a:ea typeface="Microsoft JhengHei"/>
-                <a:cs typeface="Microsoft JhengHei"/>
-              </a:rPr>
-              <a:t>TF-IDF＋cosine</a:t>
-            </a:r>
-            <a:r>
-              <a:rPr sz="2100" b="0" dirty="0">
-                <a:solidFill>
-                  <a:srgbClr val="173340"/>
-                </a:solidFill>
-                <a:latin typeface="Microsoft JhengHei"/>
-                <a:ea typeface="Microsoft JhengHei"/>
-                <a:cs typeface="Microsoft JhengHei"/>
-              </a:rPr>
-              <a:t> → </a:t>
-            </a:r>
-            <a:r>
-              <a:rPr sz="2100" b="0" dirty="0" err="1">
-                <a:solidFill>
-                  <a:srgbClr val="173340"/>
-                </a:solidFill>
-                <a:latin typeface="Microsoft JhengHei"/>
-                <a:ea typeface="Microsoft JhengHei"/>
-                <a:cs typeface="Microsoft JhengHei"/>
-              </a:rPr>
-              <a:t>規則排序</a:t>
-            </a:r>
-            <a:endParaRPr lang="zh-TW" altLang="en-US" sz="2100" b="0" dirty="0" err="1">
-              <a:solidFill>
-                <a:srgbClr val="173340"/>
-              </a:solidFill>
-              <a:latin typeface="Microsoft JhengHei"/>
-              <a:ea typeface="Microsoft JhengHei"/>
-              <a:cs typeface="Microsoft JhengHei"/>
-            </a:endParaRPr>
-          </a:p>
-        </p:txBody>
-      </p:sp>
-      <p:sp>
-        <p:nvSpPr>
-          <p:cNvPr id="5" name="矩形 4">
-            <a:extLst>
-              <a:ext uri="{FF2B5EF4-FFF2-40B4-BE49-F238E27FC236}">
-                <a16:creationId xmlns:a16="http://schemas.microsoft.com/office/drawing/2014/main" id="{C2280C26-151E-4D67-9D02-1D1B2D1D05B4}"/>
-              </a:ext>
-            </a:extLst>
-          </p:cNvPr>
-          <p:cNvSpPr>
-            <a:spLocks noGrp="1"/>
-          </p:cNvSpPr>
-          <p:nvPr/>
-        </p:nvSpPr>
-        <p:spPr>
-          <a:xfrm>
-            <a:off x="609600" y="3019425"/>
-            <a:ext cx="2333625" cy="619125"/>
-          </a:xfrm>
-          <a:prstGeom prst="rect">
-            <a:avLst/>
-          </a:prstGeom>
-          <a:noFill/>
-          <a:ln w="0">
-            <a:noFill/>
-          </a:ln>
-        </p:spPr>
-        <p:txBody>
-          <a:bodyPr lIns="0" tIns="0" rIns="0" bIns="0">
-            <a:noAutofit/>
-          </a:bodyPr>
-          <a:lstStyle>
-            <a:defPPr>
-              <a:defRPr sz="2175" b="1">
-                <a:solidFill>
-                  <a:srgbClr val="00858A"/>
-                </a:solidFill>
-                <a:latin typeface="Microsoft JhengHei"/>
-                <a:ea typeface="Microsoft JhengHei"/>
-                <a:cs typeface="Microsoft JhengHei"/>
-              </a:defRPr>
-            </a:defPPr>
-          </a:lstStyle>
-          <a:p>
-            <a:pPr>
-              <a:defRPr sz="2175" b="1">
-                <a:solidFill>
-                  <a:srgbClr val="00858A"/>
-                </a:solidFill>
-                <a:latin typeface="Microsoft JhengHei"/>
-                <a:ea typeface="Microsoft JhengHei"/>
-                <a:cs typeface="Microsoft JhengHei"/>
-              </a:defRPr>
-            </a:pPr>
-            <a:r>
-              <a:rPr sz="2175" b="1">
-                <a:solidFill>
-                  <a:srgbClr val="00858A"/>
-                </a:solidFill>
-                <a:latin typeface="Microsoft JhengHei"/>
-                <a:ea typeface="Microsoft JhengHei"/>
-                <a:cs typeface="Microsoft JhengHei"/>
-              </a:rPr>
-              <a:t>向量檢索</a:t>
-            </a:r>
-          </a:p>
-        </p:txBody>
-      </p:sp>
-      <p:sp>
-        <p:nvSpPr>
-          <p:cNvPr id="6" name="矩形 5">
-            <a:extLst>
-              <a:ext uri="{FF2B5EF4-FFF2-40B4-BE49-F238E27FC236}">
-                <a16:creationId xmlns:a16="http://schemas.microsoft.com/office/drawing/2014/main" id="{08E62CCD-CEC4-481A-AFC9-FBF6AF0D1EEE}"/>
-              </a:ext>
-            </a:extLst>
-          </p:cNvPr>
-          <p:cNvSpPr>
-            <a:spLocks noGrp="1"/>
-          </p:cNvSpPr>
-          <p:nvPr/>
-        </p:nvSpPr>
-        <p:spPr>
-          <a:xfrm>
-            <a:off x="3048000" y="3019425"/>
-            <a:ext cx="8286750" cy="857250"/>
-          </a:xfrm>
-          <a:prstGeom prst="rect">
-            <a:avLst/>
-          </a:prstGeom>
-          <a:noFill/>
-          <a:ln w="0">
-            <a:noFill/>
-          </a:ln>
-        </p:spPr>
-        <p:txBody>
-          <a:bodyPr lIns="0" tIns="0" rIns="0" bIns="0">
-            <a:noAutofit/>
-          </a:bodyPr>
-          <a:lstStyle>
-            <a:defPPr>
-              <a:defRPr sz="2100" b="0">
-                <a:solidFill>
-                  <a:srgbClr val="173340"/>
-                </a:solidFill>
-                <a:latin typeface="Microsoft JhengHei"/>
-                <a:ea typeface="Microsoft JhengHei"/>
-                <a:cs typeface="Microsoft JhengHei"/>
-              </a:defRPr>
-            </a:defPPr>
-          </a:lstStyle>
-          <a:p>
-            <a:pPr>
-              <a:defRPr sz="2100" b="0">
-                <a:solidFill>
-                  <a:srgbClr val="173340"/>
-                </a:solidFill>
-                <a:latin typeface="Microsoft JhengHei"/>
-                <a:ea typeface="Microsoft JhengHei"/>
-                <a:cs typeface="Microsoft JhengHei"/>
-              </a:defRPr>
-            </a:pPr>
-            <a:r>
-              <a:rPr sz="2100" b="0">
-                <a:solidFill>
-                  <a:srgbClr val="173340"/>
-                </a:solidFill>
-                <a:latin typeface="Microsoft JhengHei"/>
-                <a:ea typeface="Microsoft JhengHei"/>
-                <a:cs typeface="Microsoft JhengHei"/>
-              </a:rPr>
-              <a:t>Embedding 產生向量 → FAISS 搜尋 → 取回原文</a:t>
-            </a:r>
-          </a:p>
-        </p:txBody>
-      </p:sp>
-      <p:sp>
-        <p:nvSpPr>
-          <p:cNvPr id="7" name="矩形 6">
-            <a:extLst>
-              <a:ext uri="{FF2B5EF4-FFF2-40B4-BE49-F238E27FC236}">
-                <a16:creationId xmlns:a16="http://schemas.microsoft.com/office/drawing/2014/main" id="{FC1EF00D-93C8-4CD3-8311-86065560A5C0}"/>
-              </a:ext>
-            </a:extLst>
-          </p:cNvPr>
-          <p:cNvSpPr>
-            <a:spLocks noGrp="1"/>
-          </p:cNvSpPr>
-          <p:nvPr/>
-        </p:nvSpPr>
-        <p:spPr>
-          <a:xfrm>
-            <a:off x="609600" y="4276725"/>
-            <a:ext cx="2333625" cy="619125"/>
-          </a:xfrm>
-          <a:prstGeom prst="rect">
-            <a:avLst/>
-          </a:prstGeom>
-          <a:noFill/>
-          <a:ln w="0">
-            <a:noFill/>
-          </a:ln>
-        </p:spPr>
-        <p:txBody>
-          <a:bodyPr lIns="0" tIns="0" rIns="0" bIns="0">
-            <a:noAutofit/>
-          </a:bodyPr>
-          <a:lstStyle>
-            <a:defPPr>
-              <a:defRPr sz="2175" b="1">
-                <a:solidFill>
-                  <a:srgbClr val="00858A"/>
-                </a:solidFill>
-                <a:latin typeface="Microsoft JhengHei"/>
-                <a:ea typeface="Microsoft JhengHei"/>
-                <a:cs typeface="Microsoft JhengHei"/>
-              </a:defRPr>
-            </a:defPPr>
-          </a:lstStyle>
-          <a:p>
-            <a:pPr>
-              <a:defRPr sz="2175" b="1">
-                <a:solidFill>
-                  <a:srgbClr val="00858A"/>
-                </a:solidFill>
-                <a:latin typeface="Microsoft JhengHei"/>
-                <a:ea typeface="Microsoft JhengHei"/>
-                <a:cs typeface="Microsoft JhengHei"/>
-              </a:defRPr>
-            </a:pPr>
-            <a:r>
-              <a:rPr sz="2175" b="1">
-                <a:solidFill>
-                  <a:srgbClr val="00858A"/>
-                </a:solidFill>
-                <a:latin typeface="Microsoft JhengHei"/>
-                <a:ea typeface="Microsoft JhengHei"/>
-                <a:cs typeface="Microsoft JhengHei"/>
-              </a:rPr>
-              <a:t>生成端</a:t>
-            </a:r>
-          </a:p>
-        </p:txBody>
-      </p:sp>
-      <p:sp>
-        <p:nvSpPr>
-          <p:cNvPr id="8" name="矩形 7">
-            <a:extLst>
-              <a:ext uri="{FF2B5EF4-FFF2-40B4-BE49-F238E27FC236}">
-                <a16:creationId xmlns:a16="http://schemas.microsoft.com/office/drawing/2014/main" id="{A858D408-3A07-4964-9785-11073DD79796}"/>
-              </a:ext>
-            </a:extLst>
-          </p:cNvPr>
-          <p:cNvSpPr>
-            <a:spLocks noGrp="1"/>
-          </p:cNvSpPr>
-          <p:nvPr/>
-        </p:nvSpPr>
-        <p:spPr>
-          <a:xfrm>
-            <a:off x="3048000" y="4276725"/>
-            <a:ext cx="8286750" cy="857250"/>
-          </a:xfrm>
-          <a:prstGeom prst="rect">
-            <a:avLst/>
-          </a:prstGeom>
-          <a:noFill/>
-          <a:ln w="0">
-            <a:noFill/>
-          </a:ln>
-        </p:spPr>
-        <p:txBody>
-          <a:bodyPr lIns="0" tIns="0" rIns="0" bIns="0">
-            <a:noAutofit/>
-          </a:bodyPr>
-          <a:lstStyle>
-            <a:defPPr>
-              <a:defRPr sz="2100" b="0">
-                <a:solidFill>
-                  <a:srgbClr val="173340"/>
-                </a:solidFill>
-                <a:latin typeface="Microsoft JhengHei"/>
-                <a:ea typeface="Microsoft JhengHei"/>
-                <a:cs typeface="Microsoft JhengHei"/>
-              </a:defRPr>
-            </a:defPPr>
-          </a:lstStyle>
-          <a:p>
-            <a:pPr>
-              <a:defRPr sz="2100" b="0">
-                <a:solidFill>
-                  <a:srgbClr val="173340"/>
-                </a:solidFill>
-                <a:latin typeface="Microsoft JhengHei"/>
-                <a:ea typeface="Microsoft JhengHei"/>
-                <a:cs typeface="Microsoft JhengHei"/>
-              </a:defRPr>
-            </a:pPr>
-            <a:r>
-              <a:rPr sz="2100" b="0">
-                <a:solidFill>
-                  <a:srgbClr val="173340"/>
-                </a:solidFill>
-                <a:latin typeface="Microsoft JhengHei"/>
-                <a:ea typeface="Microsoft JhengHei"/>
-                <a:cs typeface="Microsoft JhengHei"/>
-              </a:rPr>
-              <a:t>讀取問題與文件；IDEAL-RAG 再明確拆開知識處理</a:t>
-            </a:r>
-          </a:p>
-        </p:txBody>
-      </p:sp>
-      <p:sp>
-        <p:nvSpPr>
-          <p:cNvPr id="9" name="矩形 8">
-            <a:extLst>
-              <a:ext uri="{FF2B5EF4-FFF2-40B4-BE49-F238E27FC236}">
-                <a16:creationId xmlns:a16="http://schemas.microsoft.com/office/drawing/2014/main" id="{2BD0F9F9-C9A6-4D0E-82C1-0ADC374BBC9C}"/>
-              </a:ext>
-            </a:extLst>
-          </p:cNvPr>
-          <p:cNvSpPr>
-            <a:spLocks noGrp="1"/>
-          </p:cNvSpPr>
-          <p:nvPr/>
-        </p:nvSpPr>
-        <p:spPr>
-          <a:xfrm>
-            <a:off x="590550" y="6057900"/>
-            <a:ext cx="10763250" cy="342900"/>
-          </a:xfrm>
-          <a:prstGeom prst="rect">
-            <a:avLst/>
-          </a:prstGeom>
-          <a:noFill/>
-          <a:ln w="0">
-            <a:noFill/>
-          </a:ln>
-        </p:spPr>
-        <p:txBody>
-          <a:bodyPr lIns="0" tIns="0" rIns="0" bIns="0">
-            <a:noAutofit/>
-          </a:bodyPr>
-          <a:lstStyle>
-            <a:defPPr>
-              <a:defRPr sz="1500" b="0">
-                <a:solidFill>
-                  <a:srgbClr val="5F717B"/>
-                </a:solidFill>
-                <a:latin typeface="Microsoft JhengHei"/>
-                <a:ea typeface="Microsoft JhengHei"/>
-                <a:cs typeface="Microsoft JhengHei"/>
-              </a:defRPr>
-            </a:defPPr>
-          </a:lstStyle>
-          <a:p>
-            <a:pPr>
-              <a:defRPr sz="1500" b="0">
-                <a:solidFill>
-                  <a:srgbClr val="5F717B"/>
-                </a:solidFill>
-                <a:latin typeface="Microsoft JhengHei"/>
-                <a:ea typeface="Microsoft JhengHei"/>
-                <a:cs typeface="Microsoft JhengHei"/>
-              </a:defRPr>
-            </a:pPr>
-            <a:r>
-              <a:rPr sz="1500" b="0">
-                <a:solidFill>
-                  <a:srgbClr val="5F717B"/>
-                </a:solidFill>
-                <a:latin typeface="Microsoft JhengHei"/>
-                <a:ea typeface="Microsoft JhengHei"/>
-                <a:cs typeface="Microsoft JhengHei"/>
-              </a:rPr>
-              <a:t>現場 Demo：檢索與IDEAL核心展示.ipynb，第 1～3 節。</a:t>
-            </a:r>
-          </a:p>
-        </p:txBody>
-      </p:sp>
-    </p:spTree>
-    <p:extLst>
-      <p:ext uri="{BB962C8B-B14F-4D97-AF65-F5344CB8AC3E}">
-        <p14:creationId xmlns:p14="http://schemas.microsoft.com/office/powerpoint/2010/main" val="371108272"/>
       </p:ext>
     </p:extLst>
   </p:cSld>
